--- a/slides/mapreduce/mapreduce_by_Mahmoud_Parsian/09_combiners_in_mapreduce.pptx
+++ b/slides/mapreduce/mapreduce_by_Mahmoud_Parsian/09_combiners_in_mapreduce.pptx
@@ -10826,7 +10826,7 @@
                 <a:latin typeface="Consolas" panose="020B0609020204030204" pitchFamily="49" charset="0"/>
                 <a:cs typeface="Consolas" panose="020B0609020204030204" pitchFamily="49" charset="0"/>
               </a:rPr>
-              <a:t>Let say we have 2 partitions</a:t>
+              <a:t>Let’s say we have 2 partitions</a:t>
             </a:r>
           </a:p>
           <a:p>
@@ -11189,7 +11189,7 @@
                 <a:latin typeface="Consolas" panose="020B0609020204030204" pitchFamily="49" charset="0"/>
                 <a:cs typeface="Consolas" panose="020B0609020204030204" pitchFamily="49" charset="0"/>
               </a:rPr>
-              <a:t>Let say we have 2 partitions</a:t>
+              <a:t>Let’s say we have 2 partitions</a:t>
             </a:r>
           </a:p>
           <a:p>
@@ -11542,7 +11542,7 @@
                 <a:latin typeface="Consolas" panose="020B0609020204030204" pitchFamily="49" charset="0"/>
                 <a:cs typeface="Consolas" panose="020B0609020204030204" pitchFamily="49" charset="0"/>
               </a:rPr>
-              <a:t>Let say we have 2 partitions:</a:t>
+              <a:t>Let’s say we have 2 partitions:</a:t>
             </a:r>
           </a:p>
           <a:p>
@@ -11987,7 +11987,7 @@
                 <a:latin typeface="Consolas" panose="020B0609020204030204" pitchFamily="49" charset="0"/>
                 <a:cs typeface="Consolas" panose="020B0609020204030204" pitchFamily="49" charset="0"/>
               </a:rPr>
-              <a:t>Let say we have 2 partitions:</a:t>
+              <a:t>Let’s say we have 2 partitions:</a:t>
             </a:r>
           </a:p>
           <a:p>
@@ -12944,7 +12944,7 @@
           <a:p>
             <a:r>
               <a:rPr lang="en-US" dirty="0"/>
-              <a:t>What  to consider for combiners &amp; reducers</a:t>
+              <a:t>What to consider for combiners &amp; reducers</a:t>
             </a:r>
           </a:p>
         </p:txBody>
@@ -13205,7 +13205,7 @@
             <a:pPr lvl="1"/>
             <a:r>
               <a:rPr lang="en-US" dirty="0"/>
-              <a:t>  20 * 30 = 30 *20 </a:t>
+              <a:t>  20 * 30 = 30 * 20 = 600</a:t>
             </a:r>
           </a:p>
         </p:txBody>
@@ -13861,7 +13861,7 @@
             </a:r>
             <a:r>
               <a:rPr lang="en-US" sz="2800" dirty="0"/>
-              <a:t>” that summarizes the mappers output </a:t>
+              <a:t>” that summarizes the mappers’ output </a:t>
             </a:r>
             <a:r>
               <a:rPr lang="en-US" sz="2800" b="1" u="sng" dirty="0"/>
@@ -13873,13 +13873,13 @@
             </a:r>
             <a:r>
               <a:rPr lang="en-US" sz="2800" dirty="0"/>
-              <a:t>before passing to the Reducer. </a:t>
+              <a:t>before passing it to the Reducer. </a:t>
             </a:r>
           </a:p>
           <a:p>
             <a:r>
               <a:rPr lang="en-US" sz="2800" dirty="0"/>
-              <a:t>The primary job of Combiner is to process the output data from the mappers, before passing it to reducer. </a:t>
+              <a:t>The primary job of the Combiner is to process the output data from the mappers, before passing it to the reducer. </a:t>
             </a:r>
           </a:p>
           <a:p>
@@ -14916,7 +14916,7 @@
                 <a:latin typeface="Consolas" panose="020B0609020204030204" pitchFamily="49" charset="0"/>
                 <a:cs typeface="Consolas" panose="020B0609020204030204" pitchFamily="49" charset="0"/>
               </a:rPr>
-              <a:t>Note the the addition (+) is a </a:t>
+              <a:t>Note that the addition (+) is a </a:t>
             </a:r>
             <a:r>
               <a:rPr lang="en-US" dirty="0">
@@ -15102,7 +15102,7 @@
             </a:r>
             <a:r>
               <a:rPr lang="en-US" sz="3600" dirty="0"/>
-              <a:t> before passing to the Reducer. </a:t>
+              <a:t> before passing it to the Reducer. </a:t>
             </a:r>
           </a:p>
           <a:p>
